--- a/dataset/guides_final/NET/guide/IT-NET-002_사내 네트워크 장애 대응 가이드.pptx
+++ b/dataset/guides_final/NET/guide/IT-NET-002_사내 네트워크 장애 대응 가이드.pptx
@@ -3245,7 +3245,7 @@
                 <a:ea typeface="Malgun Gothic"/>
                 <a:cs typeface="Malgun Gothic"/>
               </a:rPr>
-              <a:t>한화시스템 ICT 임직원 IT 안내 · VPN·네트워크</a:t>
+              <a:t>가상 ICT 기업 임직원 IT 안내 · VPN·네트워크</a:t>
             </a:r>
           </a:p>
         </p:txBody>
@@ -3477,7 +3477,7 @@
                 <a:ea typeface="Malgun Gothic"/>
                 <a:cs typeface="Malgun Gothic"/>
               </a:rPr>
-              <a:t>© HANWHA SYSTEMS ICT · IT-NET-002 · 사내 일반</a:t>
+              <a:t>© 가상 ICT 기업 · IT-NET-002 · 사내 일반</a:t>
             </a:r>
           </a:p>
         </p:txBody>
@@ -5497,7 +5497,7 @@
                 <a:ea typeface="Malgun Gothic"/>
                 <a:cs typeface="Malgun Gothic"/>
               </a:rPr>
-              <a:t>© HANWHA SYSTEMS ICT · IT-NET-002 · 사내 일반</a:t>
+              <a:t>© 가상 ICT 기업 · IT-NET-002 · 사내 일반</a:t>
             </a:r>
           </a:p>
         </p:txBody>
@@ -7051,7 +7051,7 @@
                 <a:ea typeface="Malgun Gothic"/>
                 <a:cs typeface="Malgun Gothic"/>
               </a:rPr>
-              <a:t>© HANWHA SYSTEMS ICT · IT-NET-002 · 사내 일반</a:t>
+              <a:t>© 가상 ICT 기업 · IT-NET-002 · 사내 일반</a:t>
             </a:r>
           </a:p>
         </p:txBody>
@@ -8907,7 +8907,7 @@
                 <a:ea typeface="Malgun Gothic"/>
                 <a:cs typeface="Malgun Gothic"/>
               </a:rPr>
-              <a:t>© HANWHA SYSTEMS ICT · IT-NET-002 · 사내 일반</a:t>
+              <a:t>© 가상 ICT 기업 · IT-NET-002 · 사내 일반</a:t>
             </a:r>
           </a:p>
         </p:txBody>
@@ -10319,7 +10319,7 @@
                 <a:ea typeface="Malgun Gothic"/>
                 <a:cs typeface="Malgun Gothic"/>
               </a:rPr>
-              <a:t>© HANWHA SYSTEMS ICT · IT-NET-002 · 사내 일반</a:t>
+              <a:t>© 가상 ICT 기업 · IT-NET-002 · 사내 일반</a:t>
             </a:r>
           </a:p>
         </p:txBody>
@@ -12221,7 +12221,7 @@
                 <a:ea typeface="Malgun Gothic"/>
                 <a:cs typeface="Malgun Gothic"/>
               </a:rPr>
-              <a:t>© HANWHA SYSTEMS ICT · IT-NET-002 · 사내 일반</a:t>
+              <a:t>© 가상 ICT 기업 · IT-NET-002 · 사내 일반</a:t>
             </a:r>
           </a:p>
         </p:txBody>
@@ -13727,7 +13727,7 @@
                 <a:ea typeface="Malgun Gothic"/>
                 <a:cs typeface="Malgun Gothic"/>
               </a:rPr>
-              <a:t>© HANWHA SYSTEMS ICT · IT-NET-002 · 사내 일반</a:t>
+              <a:t>© 가상 ICT 기업 · IT-NET-002 · 사내 일반</a:t>
             </a:r>
           </a:p>
         </p:txBody>
@@ -15653,7 +15653,7 @@
                 <a:ea typeface="Malgun Gothic"/>
                 <a:cs typeface="Malgun Gothic"/>
               </a:rPr>
-              <a:t>© HANWHA SYSTEMS ICT · IT-NET-002 · 사내 일반</a:t>
+              <a:t>© 가상 ICT 기업 · IT-NET-002 · 사내 일반</a:t>
             </a:r>
           </a:p>
         </p:txBody>
@@ -17159,7 +17159,7 @@
                 <a:ea typeface="Malgun Gothic"/>
                 <a:cs typeface="Malgun Gothic"/>
               </a:rPr>
-              <a:t>© HANWHA SYSTEMS ICT · IT-NET-002 · 사내 일반</a:t>
+              <a:t>© 가상 ICT 기업 · IT-NET-002 · 사내 일반</a:t>
             </a:r>
           </a:p>
         </p:txBody>
@@ -18991,7 +18991,7 @@
                 <a:ea typeface="Malgun Gothic"/>
                 <a:cs typeface="Malgun Gothic"/>
               </a:rPr>
-              <a:t>© HANWHA SYSTEMS ICT · IT-NET-002 · 사내 일반</a:t>
+              <a:t>© 가상 ICT 기업 · IT-NET-002 · 사내 일반</a:t>
             </a:r>
           </a:p>
         </p:txBody>
@@ -20497,7 +20497,7 @@
                 <a:ea typeface="Malgun Gothic"/>
                 <a:cs typeface="Malgun Gothic"/>
               </a:rPr>
-              <a:t>© HANWHA SYSTEMS ICT · IT-NET-002 · 사내 일반</a:t>
+              <a:t>© 가상 ICT 기업 · IT-NET-002 · 사내 일반</a:t>
             </a:r>
           </a:p>
         </p:txBody>
@@ -22302,7 +22302,7 @@
                 <a:ea typeface="Malgun Gothic"/>
                 <a:cs typeface="Malgun Gothic"/>
               </a:rPr>
-              <a:t>© HANWHA SYSTEMS ICT · IT-NET-002 · 사내 일반</a:t>
+              <a:t>© 가상 ICT 기업 · IT-NET-002 · 사내 일반</a:t>
             </a:r>
           </a:p>
         </p:txBody>
@@ -24110,7 +24110,7 @@
                 <a:ea typeface="Malgun Gothic"/>
                 <a:cs typeface="Malgun Gothic"/>
               </a:rPr>
-              <a:t>© HANWHA SYSTEMS ICT · IT-NET-002 · 사내 일반</a:t>
+              <a:t>© 가상 ICT 기업 · IT-NET-002 · 사내 일반</a:t>
             </a:r>
           </a:p>
         </p:txBody>
@@ -25616,7 +25616,7 @@
                 <a:ea typeface="Malgun Gothic"/>
                 <a:cs typeface="Malgun Gothic"/>
               </a:rPr>
-              <a:t>© HANWHA SYSTEMS ICT · IT-NET-002 · 사내 일반</a:t>
+              <a:t>© 가상 ICT 기업 · IT-NET-002 · 사내 일반</a:t>
             </a:r>
           </a:p>
         </p:txBody>
@@ -27572,7 +27572,7 @@
                 <a:ea typeface="Malgun Gothic"/>
                 <a:cs typeface="Malgun Gothic"/>
               </a:rPr>
-              <a:t>© HANWHA SYSTEMS ICT · IT-NET-002 · 사내 일반</a:t>
+              <a:t>© 가상 ICT 기업 · IT-NET-002 · 사내 일반</a:t>
             </a:r>
           </a:p>
         </p:txBody>
@@ -29078,7 +29078,7 @@
                 <a:ea typeface="Malgun Gothic"/>
                 <a:cs typeface="Malgun Gothic"/>
               </a:rPr>
-              <a:t>© HANWHA SYSTEMS ICT · IT-NET-002 · 사내 일반</a:t>
+              <a:t>© 가상 ICT 기업 · IT-NET-002 · 사내 일반</a:t>
             </a:r>
           </a:p>
         </p:txBody>
@@ -29326,7 +29326,7 @@
                 <a:ea typeface="Malgun Gothic"/>
                 <a:cs typeface="Malgun Gothic"/>
               </a:rPr>
-              <a:t>© HANWHA SYSTEMS ICT · IT-NET-002 · 사내 일반</a:t>
+              <a:t>© 가상 ICT 기업 · IT-NET-002 · 사내 일반</a:t>
             </a:r>
           </a:p>
         </p:txBody>
@@ -30155,7 +30155,7 @@
                 <a:ea typeface="Malgun Gothic"/>
                 <a:cs typeface="Malgun Gothic"/>
               </a:rPr>
-              <a:t>© HANWHA SYSTEMS ICT · IT-NET-002 · 사내 일반</a:t>
+              <a:t>© 가상 ICT 기업 · IT-NET-002 · 사내 일반</a:t>
             </a:r>
           </a:p>
         </p:txBody>
@@ -30403,7 +30403,7 @@
                 <a:ea typeface="Malgun Gothic"/>
                 <a:cs typeface="Malgun Gothic"/>
               </a:rPr>
-              <a:t>© HANWHA SYSTEMS ICT · IT-NET-002 · 사내 일반</a:t>
+              <a:t>© 가상 ICT 기업 · IT-NET-002 · 사내 일반</a:t>
             </a:r>
           </a:p>
         </p:txBody>
@@ -31062,7 +31062,7 @@
                 <a:ea typeface="Malgun Gothic"/>
                 <a:cs typeface="Malgun Gothic"/>
               </a:rPr>
-              <a:t>© HANWHA SYSTEMS ICT · IT-NET-002 · 사내 일반</a:t>
+              <a:t>© 가상 ICT 기업 · IT-NET-002 · 사내 일반</a:t>
             </a:r>
           </a:p>
         </p:txBody>
@@ -31310,7 +31310,7 @@
                 <a:ea typeface="Malgun Gothic"/>
                 <a:cs typeface="Malgun Gothic"/>
               </a:rPr>
-              <a:t>© HANWHA SYSTEMS ICT · IT-NET-002 · 사내 일반</a:t>
+              <a:t>© 가상 ICT 기업 · IT-NET-002 · 사내 일반</a:t>
             </a:r>
           </a:p>
         </p:txBody>
@@ -31822,7 +31822,7 @@
                           <a:ea typeface="Malgun Gothic"/>
                           <a:cs typeface="Malgun Gothic"/>
                         </a:rPr>
-                        <a:t>사내 IT 포털(hanwha-admin) 상단 [챗봇 문의]</a:t>
+                        <a:t>사내 IT 포털 상단 [챗봇 문의]</a:t>
                       </a:r>
                     </a:p>
                   </a:txBody>
@@ -32514,7 +32514,7 @@
                           <a:ea typeface="Malgun Gothic"/>
                           <a:cs typeface="Malgun Gothic"/>
                         </a:rPr>
-                        <a:t>it-helpdesk@hanwha-ict.example</a:t>
+                        <a:t>it-helpdesk@ict.example</a:t>
                       </a:r>
                     </a:p>
                   </a:txBody>
@@ -32813,7 +32813,7 @@
                 <a:ea typeface="Malgun Gothic"/>
                 <a:cs typeface="Malgun Gothic"/>
               </a:rPr>
-              <a:t>© HANWHA SYSTEMS ICT · IT-NET-002 · 사내 일반</a:t>
+              <a:t>© 가상 ICT 기업 · IT-NET-002 · 사내 일반</a:t>
             </a:r>
           </a:p>
         </p:txBody>
@@ -34089,7 +34089,7 @@
                 <a:ea typeface="Malgun Gothic"/>
                 <a:cs typeface="Malgun Gothic"/>
               </a:rPr>
-              <a:t>© HANWHA SYSTEMS ICT · IT-NET-002 · 사내 일반</a:t>
+              <a:t>© 가상 ICT 기업 · IT-NET-002 · 사내 일반</a:t>
             </a:r>
           </a:p>
         </p:txBody>
@@ -34337,7 +34337,7 @@
                 <a:ea typeface="Malgun Gothic"/>
                 <a:cs typeface="Malgun Gothic"/>
               </a:rPr>
-              <a:t>© HANWHA SYSTEMS ICT · IT-NET-002 · 사내 일반</a:t>
+              <a:t>© 가상 ICT 기업 · IT-NET-002 · 사내 일반</a:t>
             </a:r>
           </a:p>
         </p:txBody>
@@ -36386,7 +36386,7 @@
                 <a:ea typeface="Malgun Gothic"/>
                 <a:cs typeface="Malgun Gothic"/>
               </a:rPr>
-              <a:t>© HANWHA SYSTEMS ICT · IT-NET-002 · 사내 일반</a:t>
+              <a:t>© 가상 ICT 기업 · IT-NET-002 · 사내 일반</a:t>
             </a:r>
           </a:p>
         </p:txBody>
@@ -37363,7 +37363,7 @@
                 <a:ea typeface="Malgun Gothic"/>
                 <a:cs typeface="Malgun Gothic"/>
               </a:rPr>
-              <a:t>© HANWHA SYSTEMS ICT · IT-NET-002 · 사내 일반</a:t>
+              <a:t>© 가상 ICT 기업 · IT-NET-002 · 사내 일반</a:t>
             </a:r>
           </a:p>
         </p:txBody>
@@ -37611,7 +37611,7 @@
                 <a:ea typeface="Malgun Gothic"/>
                 <a:cs typeface="Malgun Gothic"/>
               </a:rPr>
-              <a:t>© HANWHA SYSTEMS ICT · IT-NET-002 · 사내 일반</a:t>
+              <a:t>© 가상 ICT 기업 · IT-NET-002 · 사내 일반</a:t>
             </a:r>
           </a:p>
         </p:txBody>
@@ -38403,7 +38403,7 @@
                 <a:ea typeface="Malgun Gothic"/>
                 <a:cs typeface="Malgun Gothic"/>
               </a:rPr>
-              <a:t>© HANWHA SYSTEMS ICT · IT-NET-002 · 사내 일반</a:t>
+              <a:t>© 가상 ICT 기업 · IT-NET-002 · 사내 일반</a:t>
             </a:r>
           </a:p>
         </p:txBody>
@@ -38651,7 +38651,7 @@
                 <a:ea typeface="Malgun Gothic"/>
                 <a:cs typeface="Malgun Gothic"/>
               </a:rPr>
-              <a:t>© HANWHA SYSTEMS ICT · IT-NET-002 · 사내 일반</a:t>
+              <a:t>© 가상 ICT 기업 · IT-NET-002 · 사내 일반</a:t>
             </a:r>
           </a:p>
         </p:txBody>
@@ -39404,7 +39404,7 @@
                 <a:ea typeface="Malgun Gothic"/>
                 <a:cs typeface="Malgun Gothic"/>
               </a:rPr>
-              <a:t>© HANWHA SYSTEMS ICT · IT-NET-002 · 사내 일반</a:t>
+              <a:t>© 가상 ICT 기업 · IT-NET-002 · 사내 일반</a:t>
             </a:r>
           </a:p>
         </p:txBody>
@@ -39652,7 +39652,7 @@
                 <a:ea typeface="Malgun Gothic"/>
                 <a:cs typeface="Malgun Gothic"/>
               </a:rPr>
-              <a:t>© HANWHA SYSTEMS ICT · IT-NET-002 · 사내 일반</a:t>
+              <a:t>© 가상 ICT 기업 · IT-NET-002 · 사내 일반</a:t>
             </a:r>
           </a:p>
         </p:txBody>
@@ -42180,7 +42180,7 @@
                 <a:ea typeface="Malgun Gothic"/>
                 <a:cs typeface="Malgun Gothic"/>
               </a:rPr>
-              <a:t>© HANWHA SYSTEMS ICT · IT-NET-002 · 사내 일반</a:t>
+              <a:t>© 가상 ICT 기업 · IT-NET-002 · 사내 일반</a:t>
             </a:r>
           </a:p>
         </p:txBody>
